--- a/SWARMOS_JUDGE_DEMO_SIH26123.pptx
+++ b/SWARMOS_JUDGE_DEMO_SIH26123.pptx
@@ -14,6 +14,7 @@
     <p:sldId id="262" r:id="rId14"/>
     <p:sldId id="263" r:id="rId15"/>
     <p:sldId id="264" r:id="rId16"/>
+    <p:sldId id="265" r:id="rId17"/>
   </p:sldIdLst>
   <p:sldSz cx="12191695" cy="6858000" type="screen4x3"/>
   <p:notesSz cx="6858000" cy="9144000"/>
@@ -545,6 +546,76 @@
 </p:notes>
 </file>
 
+<file path=ppt/notesSlides/notesSlide10.xml><?xml version="1.0" encoding="utf-8"?>
+<p:notes xmlns:a="http://schemas.openxmlformats.org/drawingml/2006/main" xmlns:p="http://schemas.openxmlformats.org/presentationml/2006/main" xmlns:r="http://schemas.openxmlformats.org/officeDocument/2006/relationships">
+  <p:cSld>
+    <p:spTree>
+      <p:nvGrpSpPr>
+        <p:cNvPr id="1" name=""/>
+        <p:cNvGrpSpPr/>
+        <p:nvPr/>
+      </p:nvGrpSpPr>
+      <p:grpSpPr>
+        <a:xfrm>
+          <a:off x="0" y="0"/>
+          <a:ext cx="0" cy="0"/>
+          <a:chOff x="0" y="0"/>
+          <a:chExt cx="0" cy="0"/>
+        </a:xfrm>
+      </p:grpSpPr>
+      <p:sp>
+        <p:nvSpPr>
+          <p:cNvPr id="2" name="Slide Image Placeholder 1"/>
+          <p:cNvSpPr>
+            <a:spLocks noGrp="1"/>
+          </p:cNvSpPr>
+          <p:nvPr>
+            <p:ph type="sldImg" idx="2"/>
+          </p:nvPr>
+        </p:nvSpPr>
+        <p:spPr/>
+      </p:sp>
+      <p:sp>
+        <p:nvSpPr>
+          <p:cNvPr id="3" name="Notes Placeholder 2"/>
+          <p:cNvSpPr>
+            <a:spLocks noGrp="1"/>
+          </p:cNvSpPr>
+          <p:nvPr>
+            <p:ph type="body" idx="3" sz="quarter"/>
+          </p:nvPr>
+        </p:nvSpPr>
+        <p:spPr/>
+        <p:txBody>
+          <a:bodyPr/>
+          <a:lstStyle/>
+          <a:p>
+            <a:r>
+              <a:t>End on the four claims rated GENUINE or GENUINE-NEW in our own internal review. Do not oversell the rest -- the honesty is the close.</a:t>
+            </a:r>
+          </a:p>
+        </p:txBody>
+      </p:sp>
+      <p:sp>
+        <p:nvSpPr>
+          <p:cNvPr id="4" name="Slide Number Placeholder 3"/>
+          <p:cNvSpPr>
+            <a:spLocks noGrp="1"/>
+          </p:cNvSpPr>
+          <p:nvPr>
+            <p:ph type="sldNum" idx="5" sz="quarter"/>
+          </p:nvPr>
+        </p:nvSpPr>
+        <p:spPr/>
+      </p:sp>
+    </p:spTree>
+  </p:cSld>
+  <p:clrMapOvr>
+    <a:masterClrMapping/>
+  </p:clrMapOvr>
+</p:notes>
+</file>
+
 <file path=ppt/notesSlides/notesSlide2.xml><?xml version="1.0" encoding="utf-8"?>
 <p:notes xmlns:a="http://schemas.openxmlformats.org/drawingml/2006/main" xmlns:p="http://schemas.openxmlformats.org/presentationml/2006/main" xmlns:r="http://schemas.openxmlformats.org/officeDocument/2006/relationships">
   <p:cSld>
@@ -782,7 +853,7 @@
           </a:p>
           <a:p>
             <a:r>
-              <a:t>4) Say: "This grading is the single biggest reason we beat stop-and-wait on throughput."</a:t>
+              <a:t>4) Say: "Grading keeps traffic moving instead of stopping everyone; the C2 result is quoted only from the frozen benchmark slide."</a:t>
             </a:r>
           </a:p>
           <a:p/>
@@ -1094,12 +1165,12 @@
           <a:p/>
           <a:p>
             <a:r>
-              <a:t>ANTICIPATED QUESTION: What is the current honest result?</a:t>
-            </a:r>
-          </a:p>
-          <a:p>
-            <a:r>
-              <a:t>ANSWER: Throughput-time reduction target is &gt;=20%; current measured mean is +2.0%, 95% CI [-5.9%, +9.8%] -- NOT MET, and we say so directly rather than hide it.</a:t>
+              <a:t>ANTICIPATED QUESTION: Is this live view the C2 result?</a:t>
+            </a:r>
+          </a:p>
+          <a:p>
+            <a:r>
+              <a:t>ANSWER: No -- it is a one-seed illustration, and its SWARMOS arm still uses the pre-v3 settings. C2 is quoted only from the frozen v3 simulation benchmark (next slides): +48.9%, 95% CI [+35.3%, +62.5%], mostly reliability.</a:t>
             </a:r>
           </a:p>
           <a:p/>
@@ -1170,7 +1241,7 @@
           <a:lstStyle/>
           <a:p>
             <a:r>
-              <a:t>This slide is a credibility weapon, not a weakness. Say it BEFORE a judge finds it -- it proves the team can tell real novelty apart from standard practice, which is rarer at hackathon scale than a clean demo.</a:t>
+              <a:t>Source: docs/C2_V3_PRODUCT_RESULT.md. Say 'simulation benchmark'. Give the speed caveat and the open-floor slowdown BEFORE anyone asks. Do not say SWARMOS is universally faster, and do not claim hardware certification.</a:t>
             </a:r>
           </a:p>
         </p:txBody>
@@ -1240,7 +1311,7 @@
           <a:lstStyle/>
           <a:p>
             <a:r>
-              <a:t>End on the four claims rated GENUINE or GENUINE-NEW in our own internal review. Do not oversell the rest -- the honesty is the close.</a:t>
+              <a:t>This slide is a credibility weapon, not a weakness. Say it BEFORE a judge finds it -- it proves the team can tell real novelty apart from standard practice, which is rarer at hackathon scale than a clean demo.</a:t>
             </a:r>
           </a:p>
         </p:txBody>
@@ -4396,6 +4467,205 @@
 </p:sld>
 </file>
 
+<file path=ppt/slides/slide10.xml><?xml version="1.0" encoding="utf-8"?>
+<p:sld xmlns:a="http://schemas.openxmlformats.org/drawingml/2006/main" xmlns:p="http://schemas.openxmlformats.org/presentationml/2006/main" xmlns:r="http://schemas.openxmlformats.org/officeDocument/2006/relationships">
+  <p:cSld>
+    <p:spTree>
+      <p:nvGrpSpPr>
+        <p:cNvPr id="1" name=""/>
+        <p:cNvGrpSpPr/>
+        <p:nvPr/>
+      </p:nvGrpSpPr>
+      <p:grpSpPr/>
+      <p:sp>
+        <p:nvSpPr>
+          <p:cNvPr id="2" name="TextBox 1"/>
+          <p:cNvSpPr txBox="1"/>
+          <p:nvPr/>
+        </p:nvSpPr>
+        <p:spPr>
+          <a:xfrm>
+            <a:off x="502920" y="45720"/>
+            <a:ext cx="11155680" cy="320040"/>
+          </a:xfrm>
+          <a:prstGeom prst="rect">
+            <a:avLst/>
+          </a:prstGeom>
+          <a:noFill/>
+        </p:spPr>
+        <p:txBody>
+          <a:bodyPr wrap="none">
+            <a:spAutoFit/>
+          </a:bodyPr>
+          <a:lstStyle/>
+          <a:p>
+            <a:r>
+              <a:rPr sz="1200" b="1">
+                <a:solidFill>
+                  <a:srgbClr val="1F7A6C"/>
+                </a:solidFill>
+              </a:rPr>
+              <a:t>CLOSE ON THIS</a:t>
+            </a:r>
+          </a:p>
+        </p:txBody>
+      </p:sp>
+      <p:sp>
+        <p:nvSpPr>
+          <p:cNvPr id="3" name="TextBox 2"/>
+          <p:cNvSpPr txBox="1"/>
+          <p:nvPr/>
+        </p:nvSpPr>
+        <p:spPr>
+          <a:xfrm>
+            <a:off x="502920" y="320040"/>
+            <a:ext cx="11155680" cy="914400"/>
+          </a:xfrm>
+          <a:prstGeom prst="rect">
+            <a:avLst/>
+          </a:prstGeom>
+          <a:noFill/>
+        </p:spPr>
+        <p:txBody>
+          <a:bodyPr wrap="square">
+            <a:spAutoFit/>
+          </a:bodyPr>
+          <a:lstStyle/>
+          <a:p>
+            <a:r>
+              <a:rPr sz="3000" b="1">
+                <a:solidFill>
+                  <a:srgbClr val="121E33"/>
+                </a:solidFill>
+              </a:rPr>
+              <a:t>What IS Genuinely New</a:t>
+            </a:r>
+          </a:p>
+        </p:txBody>
+      </p:sp>
+      <p:sp>
+        <p:nvSpPr>
+          <p:cNvPr id="4" name="TextBox 3"/>
+          <p:cNvSpPr txBox="1"/>
+          <p:nvPr/>
+        </p:nvSpPr>
+        <p:spPr>
+          <a:xfrm>
+            <a:off x="502920" y="1188720"/>
+            <a:ext cx="11155680" cy="5120640"/>
+          </a:xfrm>
+          <a:prstGeom prst="rect">
+            <a:avLst/>
+          </a:prstGeom>
+          <a:noFill/>
+        </p:spPr>
+        <p:txBody>
+          <a:bodyPr wrap="square">
+            <a:spAutoFit/>
+          </a:bodyPr>
+          <a:lstStyle/>
+          <a:p>
+            <a:pPr>
+              <a:spcAft>
+                <a:spcPts val="1000"/>
+              </a:spcAft>
+            </a:pPr>
+            <a:r>
+              <a:rPr b="1" sz="1800">
+                <a:solidFill>
+                  <a:srgbClr val="1F7A6C"/>
+                </a:solidFill>
+              </a:rPr>
+              <a:t>N3  </a:t>
+            </a:r>
+            <a:r>
+              <a:rPr sz="1800">
+                <a:solidFill>
+                  <a:srgbClr val="222830"/>
+                </a:solidFill>
+              </a:rPr>
+              <a:t>Deterministic replay -- same seed, identical trace hash, provable live.</a:t>
+            </a:r>
+          </a:p>
+          <a:p>
+            <a:pPr>
+              <a:spcAft>
+                <a:spcPts val="1000"/>
+              </a:spcAft>
+            </a:pPr>
+            <a:r>
+              <a:rPr b="1" sz="1800">
+                <a:solidFill>
+                  <a:srgbClr val="1F7A6C"/>
+                </a:solidFill>
+              </a:rPr>
+              <a:t>N5  </a:t>
+            </a:r>
+            <a:r>
+              <a:rPr sz="1800">
+                <a:solidFill>
+                  <a:srgbClr val="222830"/>
+                </a:solidFill>
+              </a:rPr>
+              <a:t>Simplex safety kernel with a firewalled AI advisory layer.</a:t>
+            </a:r>
+          </a:p>
+          <a:p>
+            <a:pPr>
+              <a:spcAft>
+                <a:spcPts val="1000"/>
+              </a:spcAft>
+            </a:pPr>
+            <a:r>
+              <a:rPr b="1" sz="1800">
+                <a:solidFill>
+                  <a:srgbClr val="1F7A6C"/>
+                </a:solidFill>
+              </a:rPr>
+              <a:t>N9  </a:t>
+            </a:r>
+            <a:r>
+              <a:rPr sz="1800">
+                <a:solidFill>
+                  <a:srgbClr val="222830"/>
+                </a:solidFill>
+              </a:rPr>
+              <a:t>Adversarial robot containment -- Byzantine-tolerant allocation, rare at this scale.</a:t>
+            </a:r>
+          </a:p>
+          <a:p>
+            <a:pPr>
+              <a:spcAft>
+                <a:spcPts val="1000"/>
+              </a:spcAft>
+            </a:pPr>
+            <a:r>
+              <a:rPr b="1" sz="1800">
+                <a:solidFill>
+                  <a:srgbClr val="1F7A6C"/>
+                </a:solidFill>
+              </a:rPr>
+              <a:t>N10  </a:t>
+            </a:r>
+            <a:r>
+              <a:rPr sz="1800">
+                <a:solidFill>
+                  <a:srgbClr val="222830"/>
+                </a:solidFill>
+              </a:rPr>
+              <a:t>Paired counterfactual co-simulation against a fairly-tuned classical baseline.</a:t>
+            </a:r>
+          </a:p>
+        </p:txBody>
+      </p:sp>
+    </p:spTree>
+  </p:cSld>
+  <p:clrMapOvr>
+    <a:masterClrMapping/>
+  </p:clrMapOvr>
+</p:sld>
+</file>
+
 <file path=ppt/slides/slide2.xml><?xml version="1.0" encoding="utf-8"?>
 <p:sld xmlns:a="http://schemas.openxmlformats.org/drawingml/2006/main" xmlns:p="http://schemas.openxmlformats.org/presentationml/2006/main" xmlns:r="http://schemas.openxmlformats.org/officeDocument/2006/relationships">
   <p:cSld>
@@ -4978,7 +5248,7 @@
                   <a:srgbClr val="1F7A6C"/>
                 </a:solidFill>
               </a:rPr>
-              <a:t>"This grading is the single biggest reason we beat stop-and-wait on throughput."</a:t>
+              <a:t>"Grading keeps traffic moving instead of stopping everyone; the C2 result is quoted only from the frozen benchmark slide."</a:t>
             </a:r>
           </a:p>
         </p:txBody>
@@ -5626,7 +5896,7 @@
                   <a:srgbClr val="1F7A6C"/>
                 </a:solidFill>
               </a:rPr>
-              <a:t>SAY THIS PROACTIVELY -- DO NOT WAIT TO BE ASKED</a:t>
+              <a:t>SIMULATION BENCHMARK -- FROZEN PROTOCOL V3 -- PRODUCT DEFAULT</a:t>
             </a:r>
           </a:p>
         </p:txBody>
@@ -5656,10 +5926,10 @@
             <a:r>
               <a:rPr sz="3000" b="1">
                 <a:solidFill>
-                  <a:srgbClr val="B43A2B"/>
-                </a:solidFill>
-              </a:rPr>
-              <a:t>What We Are NOT Claiming</a:t>
+                  <a:srgbClr val="121E33"/>
+                </a:solidFill>
+              </a:rPr>
+              <a:t>C2 Result: SWARMOS Product vs Textbook Stop-and-Wait</a:t>
             </a:r>
           </a:p>
         </p:txBody>
@@ -5692,12 +5962,12 @@
               </a:spcAft>
             </a:pPr>
             <a:r>
-              <a:rPr sz="1600">
+              <a:rPr sz="1400">
                 <a:solidFill>
                   <a:srgbClr val="222830"/>
                 </a:solidFill>
               </a:rPr>
-              <a:t>Decentralised task auction (N1): Contract Net Protocol, 1980. We compete on measured result, not the idea.</a:t>
+              <a:t>Product default: F1 + F3 + F5 + F6 (F6 = 300-tick release cooldown). F2(a)/(b) OFF. Safety floor 0.75 m. Reference: textbook stop-and-wait + F1 + F6.</a:t>
             </a:r>
           </a:p>
           <a:p>
@@ -5707,12 +5977,20 @@
               </a:spcAft>
             </a:pPr>
             <a:r>
-              <a:rPr sz="1600">
+              <a:rPr b="1" sz="1400">
+                <a:solidFill>
+                  <a:srgbClr val="1F7A6C"/>
+                </a:solidFill>
+              </a:rPr>
+              <a:t>Primary  </a:t>
+            </a:r>
+            <a:r>
+              <a:rPr sz="1400">
                 <a:solidFill>
                   <a:srgbClr val="222830"/>
                 </a:solidFill>
               </a:rPr>
-              <a:t>Space-time reservation (N2): WHCA* / Kiva-class practice. Table stakes, not novel.</a:t>
+              <a:t>overlap_batch, 40 fresh seeds (600001-600040): capped time reduction +48.9%, 95% CI [+35.3%, +62.5%]. Finish rate 40/40 vs 21/40. No seed failed only by SWARMOS. All five frozen conditions passed.</a:t>
             </a:r>
           </a:p>
           <a:p>
@@ -5722,12 +6000,20 @@
               </a:spcAft>
             </a:pPr>
             <a:r>
-              <a:rPr sz="1600">
+              <a:rPr b="1" sz="1400">
+                <a:solidFill>
+                  <a:srgbClr val="1F7A6C"/>
+                </a:solidFill>
+              </a:rPr>
+              <a:t>Speed  </a:t>
+            </a:r>
+            <a:r>
+              <a:rPr sz="1400">
                 <a:solidFill>
                   <a:srgbClr val="222830"/>
                 </a:solidFill>
               </a:rPr>
-              <a:t>Deadlock ladder (N4): classical wait-for cycle detection (Coffman). The visibility of the ladder is the value-add.</a:t>
+              <a:t>Seeds where both finished: +17.5%, CI [+1.4%, +33.6%] -- below 20% on speed alone. The primary gain is mostly finishing batches the reference does not.</a:t>
             </a:r>
           </a:p>
           <a:p>
@@ -5737,12 +6023,66 @@
               </a:spcAft>
             </a:pPr>
             <a:r>
-              <a:rPr sz="1600">
+              <a:rPr b="1" sz="1400">
+                <a:solidFill>
+                  <a:srgbClr val="1F7A6C"/>
+                </a:solidFill>
+              </a:rPr>
+              <a:t>Open floor  </a:t>
+            </a:r>
+            <a:r>
+              <a:rPr sz="1400">
                 <a:solidFill>
                   <a:srgbClr val="222830"/>
                 </a:solidFill>
               </a:rPr>
-              <a:t>Throughput-time criterion (C2, target &gt;=20%): currently NOT MET. Reported honestly with the exact gap and next step.</a:t>
+              <a:t>Capped +33.7% [+4.5%, +62.8%], finish 40/40 vs 15/40 -- but SWARMOS is SLOWER when both finish.</a:t>
+            </a:r>
+          </a:p>
+          <a:p>
+            <a:pPr>
+              <a:spcAft>
+                <a:spcPts val="1000"/>
+              </a:spcAft>
+            </a:pPr>
+            <a:r>
+              <a:rPr b="1" sz="1400">
+                <a:solidFill>
+                  <a:srgbClr val="1F7A6C"/>
+                </a:solidFill>
+              </a:rPr>
+              <a:t>Safety  </a:t>
+            </a:r>
+            <a:r>
+              <a:rPr sz="1400">
+                <a:solidFill>
+                  <a:srgbClr val="222830"/>
+                </a:solidFill>
+              </a:rPr>
+              <a:t>240 runs: 0 collisions, 0 invariant failures; SWARMOS 0 margin breaches, 0 frozen pairs. The only margin breach (0.748 m) was the tuned reference arm.</a:t>
+            </a:r>
+          </a:p>
+          <a:p>
+            <a:pPr>
+              <a:spcAft>
+                <a:spcPts val="1000"/>
+              </a:spcAft>
+            </a:pPr>
+            <a:r>
+              <a:rPr b="1" sz="1400">
+                <a:solidFill>
+                  <a:srgbClr val="1F7A6C"/>
+                </a:solidFill>
+              </a:rPr>
+              <a:t>Integrity  </a:t>
+            </a:r>
+            <a:r>
+              <a:rPr sz="1400">
+                <a:solidFill>
+                  <a:srgbClr val="222830"/>
+                </a:solidFill>
+              </a:rPr>
+              <a:t>Protocol frozen before the run and byte-identical after; 240/240 replayed exactly; code identity f3dabbf0...094f.</a:t>
             </a:r>
           </a:p>
         </p:txBody>
@@ -5793,7 +6133,7 @@
                   <a:srgbClr val="1F7A6C"/>
                 </a:solidFill>
               </a:rPr>
-              <a:t>CLOSE ON THIS</a:t>
+              <a:t>SAY THIS PROACTIVELY -- DO NOT WAIT TO BE ASKED</a:t>
             </a:r>
           </a:p>
         </p:txBody>
@@ -5823,10 +6163,10 @@
             <a:r>
               <a:rPr sz="3000" b="1">
                 <a:solidFill>
-                  <a:srgbClr val="121E33"/>
-                </a:solidFill>
-              </a:rPr>
-              <a:t>What IS Genuinely New</a:t>
+                  <a:srgbClr val="B43A2B"/>
+                </a:solidFill>
+              </a:rPr>
+              <a:t>What We Are NOT Claiming</a:t>
             </a:r>
           </a:p>
         </p:txBody>
@@ -5859,20 +6199,12 @@
               </a:spcAft>
             </a:pPr>
             <a:r>
-              <a:rPr b="1" sz="1800">
-                <a:solidFill>
-                  <a:srgbClr val="1F7A6C"/>
-                </a:solidFill>
-              </a:rPr>
-              <a:t>N3  </a:t>
-            </a:r>
-            <a:r>
-              <a:rPr sz="1800">
+              <a:rPr sz="1600">
                 <a:solidFill>
                   <a:srgbClr val="222830"/>
                 </a:solidFill>
               </a:rPr>
-              <a:t>Deterministic replay -- same seed, identical trace hash, provable live.</a:t>
+              <a:t>Decentralised task auction (N1): Contract Net Protocol, 1980. We compete on measured result, not the idea.</a:t>
             </a:r>
           </a:p>
           <a:p>
@@ -5882,20 +6214,12 @@
               </a:spcAft>
             </a:pPr>
             <a:r>
-              <a:rPr b="1" sz="1800">
-                <a:solidFill>
-                  <a:srgbClr val="1F7A6C"/>
-                </a:solidFill>
-              </a:rPr>
-              <a:t>N5  </a:t>
-            </a:r>
-            <a:r>
-              <a:rPr sz="1800">
+              <a:rPr sz="1600">
                 <a:solidFill>
                   <a:srgbClr val="222830"/>
                 </a:solidFill>
               </a:rPr>
-              <a:t>Simplex safety kernel with a firewalled AI advisory layer.</a:t>
+              <a:t>Space-time reservation (N2): WHCA* / Kiva-class practice. Table stakes, not novel.</a:t>
             </a:r>
           </a:p>
           <a:p>
@@ -5905,20 +6229,12 @@
               </a:spcAft>
             </a:pPr>
             <a:r>
-              <a:rPr b="1" sz="1800">
-                <a:solidFill>
-                  <a:srgbClr val="1F7A6C"/>
-                </a:solidFill>
-              </a:rPr>
-              <a:t>N9  </a:t>
-            </a:r>
-            <a:r>
-              <a:rPr sz="1800">
+              <a:rPr sz="1600">
                 <a:solidFill>
                   <a:srgbClr val="222830"/>
                 </a:solidFill>
               </a:rPr>
-              <a:t>Adversarial robot containment -- Byzantine-tolerant allocation, rare at this scale.</a:t>
+              <a:t>Deadlock ladder (N4): classical wait-for cycle detection (Coffman). The visibility of the ladder is the value-add.</a:t>
             </a:r>
           </a:p>
           <a:p>
@@ -5928,20 +6244,12 @@
               </a:spcAft>
             </a:pPr>
             <a:r>
-              <a:rPr b="1" sz="1800">
-                <a:solidFill>
-                  <a:srgbClr val="1F7A6C"/>
-                </a:solidFill>
-              </a:rPr>
-              <a:t>N10  </a:t>
-            </a:r>
-            <a:r>
-              <a:rPr sz="1800">
+              <a:rPr sz="1600">
                 <a:solidFill>
                   <a:srgbClr val="222830"/>
                 </a:solidFill>
               </a:rPr>
-              <a:t>Paired counterfactual co-simulation against a fairly-tuned classical baseline.</a:t>
+              <a:t>C2 (target &gt;=20%): MET for the product default in a frozen SIMULATION benchmark, mostly via reliability. Speed where both finish is +17.5% (below 20% alone); slower on the open floor when both finish. No hardware certification.</a:t>
             </a:r>
           </a:p>
         </p:txBody>
